--- a/tests/fixtures/shapes.pptx
+++ b/tests/fixtures/shapes.pptx
@@ -3212,6 +3212,43 @@
             <a:r>
               <a:t>ラベル付き図形</a:t>
             </a:r>
+          </a:p>
+        </p:txBody>
+      </p:sp>
+      <p:sp>
+        <p:nvSpPr>
+          <p:cNvPr id="5" name="Oval 4"/>
+          <p:cNvSpPr/>
+          <p:nvPr/>
+        </p:nvSpPr>
+        <p:spPr>
+          <a:xfrm>
+            <a:off x="4572000" y="2743200"/>
+            <a:ext cx="1371600" cy="1371600"/>
+          </a:xfrm>
+          <a:prstGeom prst="ellipse">
+            <a:avLst/>
+          </a:prstGeom>
+        </p:spPr>
+        <p:style>
+          <a:lnRef idx="1">
+            <a:schemeClr val="accent1"/>
+          </a:lnRef>
+          <a:fillRef idx="3">
+            <a:schemeClr val="accent1"/>
+          </a:fillRef>
+          <a:effectRef idx="2">
+            <a:schemeClr val="accent1"/>
+          </a:effectRef>
+          <a:fontRef idx="minor">
+            <a:schemeClr val="lt1"/>
+          </a:fontRef>
+        </p:style>
+        <p:txBody>
+          <a:bodyPr rtlCol="0" anchor="ctr"/>
+          <a:lstStyle/>
+          <a:p>
+            <a:pPr algn="ctr"/>
           </a:p>
         </p:txBody>
       </p:sp>
